--- a/docs/instructions/Greek/EU_SAE_Workbench_Guide_2_Running_the_Workbench_GR.pptx
+++ b/docs/instructions/Greek/EU_SAE_Workbench_Guide_2_Running_the_Workbench_GR.pptx
@@ -648,7 +648,7 @@
           <a:p>
             <a:r>
               <a:rPr lang="el-GR"/>
-              <a:t>Τρέχουσες προεπιλογές: UFH arcsin για FGT0 με χωριστή διακύμανση βάσει του αποτελεσματικού μεγέθους δείγματος· sm_all χωρίς μετασχηματισμό ή για τον λογάριθμο της μέσης ευημερίας. Η επιλογή διακύμανσης UFH είναι διαθέσιμη και εφαρμόζεται στα λογαριθμικά μοντέλα. Το MFH χρησιμοποιεί εξ ορισμού sm_all και rho_sm_all, MFH2 και AIC. Οι ρητά αποθηκευμένες επιλογές διατηρούνται. Αν παραλείπεται η επιλογή συνδιακύμανσης MFH, προκύπτει από την ενεργή επιλογή διακύμανσης. Το sm_out παραμένει επιλογή ανάλυσης ευαισθησίας με αμετάβλητο όριο 0,001 στην κλίμακα μοντελοποίησης. Οι οθόνες και τα αποτελέσματα με 100 επαναλήψεις είναι παλαιότερα παραδείγματα w5o και δεν προέρχονται από τις νέες προεπιλογές.</a:t>
+              <a:t>Τρέχουσες προεπιλογές: UFH arcsin για FGT0 με χωριστή διακύμανση βάσει του αποτελεσματικού μεγέθους δείγματος· sm_out χωρίς μετασχηματισμό ή για τον λογάριθμο της μέσης ευημερίας. Η επιλογή διακύμανσης UFH είναι διαθέσιμη και εφαρμόζεται στα λογαριθμικά μοντέλα. Το MFH χρησιμοποιεί εξ ορισμού sm_out και rho_sm_out, MFH2 και AIC. Οι ρητά αποθηκευμένες επιλογές διατηρούνται. Αν παραλείπεται η επιλογή συνδιακύμανσης MFH, προκύπτει από την ενεργή επιλογή διακύμανσης. Το sm_out διατηρεί το όριο 0,001 στην κλίμακα μοντελοποίησης. Το sm_all παραμένει διαθέσιμη επιλογή· επειδή η GVF του βασίζεται μόνο στο μέγεθος του δείγματος, μπορεί να υπερεκτιμά τις διακυμάνσεις περιοχών με χαμηλή φτώχεια (Ενότητα 6.6 των οδηγιών). Οι οθόνες και τα αποτελέσματα με 100 επαναλήψεις είναι παλαιότερα παραδείγματα w5o.</a:t>
             </a:r>
             <a:endParaRPr lang="el-GR"/>
           </a:p>
@@ -3666,7 +3666,7 @@
                   <a:srgbClr val="33415C"/>
                 </a:solidFill>
               </a:rPr>
-              <a:t>MFH2, sm_all / rho_sm_all, 500 επαναλήψεις. Οι αποθηκευμένες επιλογές διατηρούνται.</a:t>
+              <a:t>MFH2, sm_out / rho_sm_out, 500 επαναλήψεις. Οι αποθηκευμένες επιλογές διατηρούνται.</a:t>
             </a:r>
             <a:endParaRPr lang="el-GR" sz="1150"/>
           </a:p>

--- a/docs/instructions/Greek/EU_SAE_Workbench_Guide_2_Running_the_Workbench_GR.pptx
+++ b/docs/instructions/Greek/EU_SAE_Workbench_Guide_2_Running_the_Workbench_GR.pptx
@@ -3702,7 +3702,7 @@
                   <a:srgbClr val="16233D"/>
                 </a:solidFill>
               </a:rPr>
-              <a:t>Συνέπεια κωδικών PSU</a:t>
+              <a:t>Σχεδιασμός PSU μεταξύ ετών</a:t>
             </a:r>
             <a:endParaRPr lang="el-GR" sz="1150"/>
           </a:p>
@@ -3716,7 +3716,7 @@
                   <a:srgbClr val="33415C"/>
                 </a:solidFill>
               </a:rPr>
-              <a:t>Data assessment: επιλέξτε μόνο αν οι κωδικοί δηλώνουν ίδιες μονάδες και στα δύο έτη.</a:t>
+              <a:t>Επιλέξτε βάσει του σχεδιασμού της έρευνας. Το MFH δεν εκτελείται με «Not specified».</a:t>
             </a:r>
             <a:endParaRPr lang="el-GR" sz="1150"/>
           </a:p>

--- a/docs/instructions/Greek/EU_SAE_Workbench_Guide_2_Running_the_Workbench_GR.pptx
+++ b/docs/instructions/Greek/EU_SAE_Workbench_Guide_2_Running_the_Workbench_GR.pptx
@@ -3992,19 +3992,13 @@
               <a:buSzPct val="100000"/>
               <a:buChar char="•"/>
             </a:pPr>
-            <a:pPr indent="0" marL="0">
-              <a:spcAft>
-                <a:spcPts val="600"/>
-              </a:spcAft>
-              <a:buNone/>
-            </a:pPr>
             <a:r>
               <a:rPr lang="el-GR" sz="1250" b="1">
                 <a:solidFill>
                   <a:srgbClr val="16233D"/>
                 </a:solidFill>
               </a:rPr>
-              <a:t xml:space="preserve">National: </a:t>
+              <a:t>National: </a:t>
             </a:r>
             <a:r>
               <a:rPr lang="el-GR" sz="1250">
@@ -4024,19 +4018,13 @@
               <a:buSzPct val="100000"/>
               <a:buChar char="•"/>
             </a:pPr>
-            <a:pPr indent="0" marL="0">
-              <a:spcAft>
-                <a:spcPts val="600"/>
-              </a:spcAft>
-              <a:buNone/>
-            </a:pPr>
             <a:r>
               <a:rPr lang="el-GR" sz="1250" b="1">
                 <a:solidFill>
                   <a:srgbClr val="16233D"/>
                 </a:solidFill>
               </a:rPr>
-              <a:t xml:space="preserve">Grouped by a survey variable: </a:t>
+              <a:t>Grouped by a survey variable: </a:t>
             </a:r>
             <a:r>
               <a:rPr lang="el-GR" sz="1250">
@@ -4056,19 +4044,13 @@
               <a:buSzPct val="100000"/>
               <a:buChar char="•"/>
             </a:pPr>
-            <a:pPr indent="0" marL="0">
-              <a:spcAft>
-                <a:spcPts val="600"/>
-              </a:spcAft>
-              <a:buNone/>
-            </a:pPr>
             <a:r>
               <a:rPr lang="el-GR" sz="1250" b="1">
                 <a:solidFill>
                   <a:srgbClr val="16233D"/>
                 </a:solidFill>
               </a:rPr>
-              <a:t xml:space="preserve">Κάθε περιοχή πρέπει να ανήκει σε μία ομάδα. </a:t>
+              <a:t>Κάθε περιοχή πρέπει να ανήκει σε μία ομάδα. </a:t>
             </a:r>
             <a:r>
               <a:rPr lang="el-GR" sz="1250">
@@ -4088,19 +4070,13 @@
               <a:buSzPct val="100000"/>
               <a:buChar char="•"/>
             </a:pPr>
-            <a:pPr indent="0" marL="0">
-              <a:spcAft>
-                <a:spcPts val="600"/>
-              </a:spcAft>
-              <a:buNone/>
-            </a:pPr>
             <a:r>
               <a:rPr lang="el-GR" sz="1250" b="1">
                 <a:solidFill>
                   <a:srgbClr val="16233D"/>
                 </a:solidFill>
               </a:rPr>
-              <a:t xml:space="preserve">Αρχείο στόχων (προαιρετικό): </a:t>
+              <a:t>Αρχείο στόχων (προαιρετικό): </a:t>
             </a:r>
             <a:r>
               <a:rPr lang="el-GR" sz="1250">
@@ -8531,19 +8507,13 @@
               <a:buSzPct val="100000"/>
               <a:buChar char="•"/>
             </a:pPr>
-            <a:pPr indent="0" marL="0">
-              <a:spcAft>
-                <a:spcPts val="400"/>
-              </a:spcAft>
-              <a:buNone/>
-            </a:pPr>
             <a:r>
               <a:rPr lang="el-GR" sz="1150" b="1">
                 <a:solidFill>
                   <a:srgbClr val="16233D"/>
                 </a:solidFill>
               </a:rPr>
-              <a:t xml:space="preserve">Save configuration: </a:t>
+              <a:t>Save configuration: </a:t>
             </a:r>
             <a:r>
               <a:rPr lang="el-GR" sz="1150">
@@ -8563,19 +8533,13 @@
               <a:buSzPct val="100000"/>
               <a:buChar char="•"/>
             </a:pPr>
-            <a:pPr indent="0" marL="0">
-              <a:spcAft>
-                <a:spcPts val="400"/>
-              </a:spcAft>
-              <a:buNone/>
-            </a:pPr>
             <a:r>
               <a:rPr lang="el-GR" sz="1150" b="1">
                 <a:solidFill>
                   <a:srgbClr val="16233D"/>
                 </a:solidFill>
               </a:rPr>
-              <a:t xml:space="preserve">Load: </a:t>
+              <a:t>Load: </a:t>
             </a:r>
             <a:r>
               <a:rPr lang="el-GR" sz="1150">
@@ -8617,19 +8581,13 @@
               <a:buSzPct val="100000"/>
               <a:buChar char="•"/>
             </a:pPr>
-            <a:pPr indent="0" marL="0">
-              <a:spcAft>
-                <a:spcPts val="400"/>
-              </a:spcAft>
-              <a:buNone/>
-            </a:pPr>
             <a:r>
               <a:rPr lang="el-GR" sz="1150" b="1">
                 <a:solidFill>
                   <a:srgbClr val="16233D"/>
                 </a:solidFill>
               </a:rPr>
-              <a:t xml:space="preserve">Άλλαξε αρχείο δεδομένων; </a:t>
+              <a:t>Άλλαξε αρχείο δεδομένων; </a:t>
             </a:r>
             <a:r>
               <a:rPr lang="el-GR" sz="1150">
@@ -8649,19 +8607,13 @@
               <a:buSzPct val="100000"/>
               <a:buChar char="•"/>
             </a:pPr>
-            <a:pPr indent="0" marL="0">
-              <a:spcAft>
-                <a:spcPts val="400"/>
-              </a:spcAft>
-              <a:buNone/>
-            </a:pPr>
             <a:r>
               <a:rPr lang="el-GR" sz="1150" b="1">
                 <a:solidFill>
                   <a:srgbClr val="16233D"/>
                 </a:solidFill>
               </a:rPr>
-              <a:t xml:space="preserve">Reset to defaults </a:t>
+              <a:t>Reset to defaults </a:t>
             </a:r>
             <a:r>
               <a:rPr lang="el-GR" sz="1150">
@@ -15620,19 +15572,13 @@
               <a:buSzPct val="100000"/>
               <a:buChar char="•"/>
             </a:pPr>
-            <a:pPr indent="0" marL="0">
-              <a:spcAft>
-                <a:spcPts val="600"/>
-              </a:spcAft>
-              <a:buNone/>
-            </a:pPr>
             <a:r>
               <a:rPr lang="el-GR" sz="1200" b="1">
                 <a:solidFill>
                   <a:srgbClr val="16233D"/>
                 </a:solidFill>
               </a:rPr>
-              <a:t xml:space="preserve">A household: </a:t>
+              <a:t>A household: </a:t>
             </a:r>
             <a:r>
               <a:rPr lang="el-GR" sz="1200">
@@ -15652,19 +15598,13 @@
               <a:buSzPct val="100000"/>
               <a:buChar char="•"/>
             </a:pPr>
-            <a:pPr indent="0" marL="0">
-              <a:spcAft>
-                <a:spcPts val="600"/>
-              </a:spcAft>
-              <a:buNone/>
-            </a:pPr>
             <a:r>
               <a:rPr lang="el-GR" sz="1200" b="1">
                 <a:solidFill>
                   <a:srgbClr val="16233D"/>
                 </a:solidFill>
               </a:rPr>
-              <a:t xml:space="preserve">A person: </a:t>
+              <a:t>A person: </a:t>
             </a:r>
             <a:r>
               <a:rPr lang="el-GR" sz="1200">
@@ -15684,19 +15624,13 @@
               <a:buSzPct val="100000"/>
               <a:buChar char="•"/>
             </a:pPr>
-            <a:pPr indent="0" marL="0">
-              <a:spcAft>
-                <a:spcPts val="600"/>
-              </a:spcAft>
-              <a:buNone/>
-            </a:pPr>
             <a:r>
               <a:rPr lang="el-GR" sz="1200" b="1">
                 <a:solidFill>
                   <a:srgbClr val="16233D"/>
                 </a:solidFill>
               </a:rPr>
-              <a:t xml:space="preserve">Household ID (optional): </a:t>
+              <a:t>Household ID (optional): </a:t>
             </a:r>
             <a:r>
               <a:rPr lang="el-GR" sz="1200">
